--- a/259219_Fido2_Demo介紹.pptx
+++ b/259219_Fido2_Demo介紹.pptx
@@ -24331,42 +24331,6 @@
       </p:grpSpPr>
       <p:sp>
         <p:nvSpPr>
-          <p:cNvPr id="2" name="標題 1">
-            <a:extLst>
-              <a:ext uri="{FF2B5EF4-FFF2-40B4-BE49-F238E27FC236}">
-                <a16:creationId xmlns:a16="http://schemas.microsoft.com/office/drawing/2014/main" id="{DA93D216-982B-81FF-80B8-E8D993811653}"/>
-              </a:ext>
-            </a:extLst>
-          </p:cNvPr>
-          <p:cNvSpPr>
-            <a:spLocks noGrp="1"/>
-          </p:cNvSpPr>
-          <p:nvPr>
-            <p:ph type="title"/>
-          </p:nvPr>
-        </p:nvSpPr>
-        <p:spPr/>
-        <p:txBody>
-          <a:bodyPr/>
-          <a:lstStyle/>
-          <a:p>
-            <a:r>
-              <a:rPr lang="zh-TW" altLang="en-US" dirty="0"/>
-              <a:t>網頁驗證流程 </a:t>
-            </a:r>
-            <a:r>
-              <a:rPr lang="en-US" altLang="zh-TW" dirty="0"/>
-              <a:t>–</a:t>
-            </a:r>
-            <a:r>
-              <a:rPr lang="zh-TW" altLang="en-US" dirty="0"/>
-              <a:t> 註冊</a:t>
-            </a:r>
-          </a:p>
-        </p:txBody>
-      </p:sp>
-      <p:sp>
-        <p:nvSpPr>
           <p:cNvPr id="6" name="矩形 5">
             <a:extLst>
               <a:ext uri="{FF2B5EF4-FFF2-40B4-BE49-F238E27FC236}">
@@ -25053,6 +25017,78 @@
               <a:rPr lang="zh-TW" altLang="en-US" dirty="0"/>
               <a:t>判斷新舊使用者</a:t>
             </a:r>
+          </a:p>
+        </p:txBody>
+      </p:sp>
+      <p:sp>
+        <p:nvSpPr>
+          <p:cNvPr id="4" name="標題 1">
+            <a:extLst>
+              <a:ext uri="{FF2B5EF4-FFF2-40B4-BE49-F238E27FC236}">
+                <a16:creationId xmlns:a16="http://schemas.microsoft.com/office/drawing/2014/main" id="{3CE99263-D9D7-F5F2-36D8-346EA8EA1A39}"/>
+              </a:ext>
+            </a:extLst>
+          </p:cNvPr>
+          <p:cNvSpPr txBox="1">
+            <a:spLocks/>
+          </p:cNvSpPr>
+          <p:nvPr/>
+        </p:nvSpPr>
+        <p:spPr>
+          <a:xfrm>
+            <a:off x="565150" y="770890"/>
+            <a:ext cx="10240521" cy="1268984"/>
+          </a:xfrm>
+          <a:prstGeom prst="rect">
+            <a:avLst/>
+          </a:prstGeom>
+        </p:spPr>
+        <p:txBody>
+          <a:bodyPr vert="horz" lIns="91440" tIns="45720" rIns="91440" bIns="45720" rtlCol="0" anchor="t">
+            <a:normAutofit/>
+          </a:bodyPr>
+          <a:lstStyle>
+            <a:lvl1pPr algn="l" defTabSz="914400" rtl="0" eaLnBrk="1" latinLnBrk="0" hangingPunct="1">
+              <a:lnSpc>
+                <a:spcPct val="100000"/>
+              </a:lnSpc>
+              <a:spcBef>
+                <a:spcPct val="0"/>
+              </a:spcBef>
+              <a:buNone/>
+              <a:defRPr sz="4000" b="1" i="0" kern="1200">
+                <a:solidFill>
+                  <a:schemeClr val="tx1"/>
+                </a:solidFill>
+                <a:latin typeface="+mj-lt"/>
+                <a:ea typeface="+mj-ea"/>
+                <a:cs typeface="+mj-cs"/>
+              </a:defRPr>
+            </a:lvl1pPr>
+          </a:lstStyle>
+          <a:p>
+            <a:r>
+              <a:rPr lang="zh-TW" altLang="en-US" dirty="0"/>
+              <a:t>網頁驗證流程 </a:t>
+            </a:r>
+            <a:r>
+              <a:rPr lang="en-US" altLang="zh-TW" dirty="0"/>
+              <a:t>– </a:t>
+            </a:r>
+            <a:r>
+              <a:rPr lang="zh-TW" altLang="en-US" dirty="0"/>
+              <a:t>註冊 </a:t>
+            </a:r>
+            <a:r>
+              <a:rPr lang="en-US" altLang="zh-TW" b="0" dirty="0">
+                <a:solidFill>
+                  <a:srgbClr val="CE9178"/>
+                </a:solidFill>
+                <a:latin typeface="Fira code" pitchFamily="1" charset="0"/>
+              </a:rPr>
+              <a:t>/register</a:t>
+            </a:r>
+            <a:endParaRPr lang="zh-TW" altLang="en-US" dirty="0"/>
           </a:p>
         </p:txBody>
       </p:sp>
